--- a/dist/초1/수학/수와연산/초1_수학_수와연산_12_두자리수의덧셈과뺄셈_학생용.pptx
+++ b/dist/초1/수학/수와연산/초1_수학_수와연산_12_두자리수의덧셈과뺄셈_학생용.pptx
@@ -120,13 +120,13 @@
   <p:extLst>
     <p:ext uri="{521415D9-36F7-43E2-AB2F-B90AF26B5E84}">
       <p14:sectionLst xmlns:p14="http://schemas.microsoft.com/office/powerpoint/2010/main">
-        <p14:section name="도입" id="{0b44626e-f611-cd82-3932-42ee384bab38}">
+        <p14:section name="도입" id="{6ff94bee-3cec-6d8d-b24b-00b8c41d9cd3}">
           <p14:sldIdLst>
             <p14:sldId id="256"/>
             <p14:sldId id="257"/>
           </p14:sldIdLst>
         </p14:section>
-        <p14:section name="개념" id="{71d7a667-8ab3-35e5-e0fc-9c7eba6ea4a4}">
+        <p14:section name="개념" id="{5e5fcf5d-f782-0a8c-f642-e19193315c16}">
           <p14:sldIdLst>
             <p14:sldId id="258"/>
             <p14:sldId id="259"/>
@@ -135,31 +135,31 @@
             <p14:sldId id="263"/>
           </p14:sldIdLst>
         </p14:section>
-        <p14:section name="연습" id="{0d103182-98d0-85f2-d55c-ecad0ae386dd}">
+        <p14:section name="연습" id="{89f3ab3a-27c9-9d09-6bdb-cfd434d20dbe}">
           <p14:sldIdLst>
             <p14:sldId id="261"/>
             <p14:sldId id="264"/>
             <p14:sldId id="265"/>
           </p14:sldIdLst>
         </p14:section>
-        <p14:section name="개념" id="{346fb5bb-9a40-2450-a0b5-f318a6b6e2b9}">
+        <p14:section name="개념" id="{90b43e11-f038-62d2-14d4-e39553e454d0}">
           <p14:sldIdLst/>
         </p14:section>
-        <p14:section name="연습" id="{c81d6c7f-5895-3a4c-fa70-e379970386f0}">
+        <p14:section name="연습" id="{0e4ebddf-5ca6-6096-a334-8f54d429f8b9}">
           <p14:sldIdLst/>
         </p14:section>
-        <p14:section name="확인" id="{11517983-290f-b46a-014c-86f89cb39a51}">
+        <p14:section name="확인" id="{c3e437a6-79de-4a1c-676f-41389743f143}">
           <p14:sldIdLst>
             <p14:sldId id="266"/>
             <p14:sldId id="267"/>
           </p14:sldIdLst>
         </p14:section>
-        <p14:section name="정리" id="{c98f695e-e029-35c4-0559-f9f740b7aad2}">
+        <p14:section name="정리" id="{ecdd63f9-2a82-32b7-716f-ae52ff6d1997}">
           <p14:sldIdLst>
             <p14:sldId id="268"/>
           </p14:sldIdLst>
         </p14:section>
-        <p14:section name="보충" id="{7852998b-a110-1a83-e106-cb36885310f1}">
+        <p14:section name="보충" id="{ee8cb220-3ade-64e1-30ec-7edb862d9485}">
           <p14:sldIdLst>
             <p14:sldId id="269"/>
           </p14:sldIdLst>

--- a/dist/초1/수학/수와연산/초1_수학_수와연산_12_두자리수의덧셈과뺄셈_학생용.pptx
+++ b/dist/초1/수학/수와연산/초1_수학_수와연산_12_두자리수의덧셈과뺄셈_학생용.pptx
@@ -120,13 +120,13 @@
   <p:extLst>
     <p:ext uri="{521415D9-36F7-43E2-AB2F-B90AF26B5E84}">
       <p14:sectionLst xmlns:p14="http://schemas.microsoft.com/office/powerpoint/2010/main">
-        <p14:section name="도입" id="{6ff94bee-3cec-6d8d-b24b-00b8c41d9cd3}">
+        <p14:section name="도입" id="{4a4067d9-ce44-ee2c-7324-4879af6ef9fe}">
           <p14:sldIdLst>
             <p14:sldId id="256"/>
             <p14:sldId id="257"/>
           </p14:sldIdLst>
         </p14:section>
-        <p14:section name="개념" id="{5e5fcf5d-f782-0a8c-f642-e19193315c16}">
+        <p14:section name="개념" id="{cdaee98f-3b1e-5862-f610-8c5a5f01fe37}">
           <p14:sldIdLst>
             <p14:sldId id="258"/>
             <p14:sldId id="259"/>
@@ -135,31 +135,31 @@
             <p14:sldId id="263"/>
           </p14:sldIdLst>
         </p14:section>
-        <p14:section name="연습" id="{89f3ab3a-27c9-9d09-6bdb-cfd434d20dbe}">
+        <p14:section name="연습" id="{44382ae3-6da7-5298-a1f0-287b38106f7b}">
           <p14:sldIdLst>
             <p14:sldId id="261"/>
             <p14:sldId id="264"/>
             <p14:sldId id="265"/>
           </p14:sldIdLst>
         </p14:section>
-        <p14:section name="개념" id="{90b43e11-f038-62d2-14d4-e39553e454d0}">
+        <p14:section name="개념" id="{ac9e2334-a510-e59e-3fe5-dbffb329ffbd}">
           <p14:sldIdLst/>
         </p14:section>
-        <p14:section name="연습" id="{0e4ebddf-5ca6-6096-a334-8f54d429f8b9}">
+        <p14:section name="연습" id="{cbabfb7e-1c31-67bb-2bd7-ff1109213f44}">
           <p14:sldIdLst/>
         </p14:section>
-        <p14:section name="확인" id="{c3e437a6-79de-4a1c-676f-41389743f143}">
+        <p14:section name="확인" id="{d56d92cb-4500-b063-e422-a7e77c3ae5d7}">
           <p14:sldIdLst>
             <p14:sldId id="266"/>
             <p14:sldId id="267"/>
           </p14:sldIdLst>
         </p14:section>
-        <p14:section name="정리" id="{ecdd63f9-2a82-32b7-716f-ae52ff6d1997}">
+        <p14:section name="정리" id="{2bb36c06-9e38-2909-4570-02a936fcd70e}">
           <p14:sldIdLst>
             <p14:sldId id="268"/>
           </p14:sldIdLst>
         </p14:section>
-        <p14:section name="보충" id="{ee8cb220-3ade-64e1-30ec-7edb862d9485}">
+        <p14:section name="보충" id="{4715217e-0114-3e0f-9c81-c9cd87a0abe2}">
           <p14:sldIdLst>
             <p14:sldId id="269"/>
           </p14:sldIdLst>

--- a/dist/초1/수학/수와연산/초1_수학_수와연산_12_두자리수의덧셈과뺄셈_학생용.pptx
+++ b/dist/초1/수학/수와연산/초1_수학_수와연산_12_두자리수의덧셈과뺄셈_학생용.pptx
@@ -120,13 +120,13 @@
   <p:extLst>
     <p:ext uri="{521415D9-36F7-43E2-AB2F-B90AF26B5E84}">
       <p14:sectionLst xmlns:p14="http://schemas.microsoft.com/office/powerpoint/2010/main">
-        <p14:section name="도입" id="{4a4067d9-ce44-ee2c-7324-4879af6ef9fe}">
+        <p14:section name="도입" id="{89be8003-650f-a95e-6f94-288c6ac946c8}">
           <p14:sldIdLst>
             <p14:sldId id="256"/>
             <p14:sldId id="257"/>
           </p14:sldIdLst>
         </p14:section>
-        <p14:section name="개념" id="{cdaee98f-3b1e-5862-f610-8c5a5f01fe37}">
+        <p14:section name="개념" id="{bb1b7a80-83f9-09dc-1ae1-701683c1e6a3}">
           <p14:sldIdLst>
             <p14:sldId id="258"/>
             <p14:sldId id="259"/>
@@ -135,31 +135,31 @@
             <p14:sldId id="263"/>
           </p14:sldIdLst>
         </p14:section>
-        <p14:section name="연습" id="{44382ae3-6da7-5298-a1f0-287b38106f7b}">
+        <p14:section name="연습" id="{2f92cce7-2487-8a01-bb68-56f9585cee91}">
           <p14:sldIdLst>
             <p14:sldId id="261"/>
             <p14:sldId id="264"/>
             <p14:sldId id="265"/>
           </p14:sldIdLst>
         </p14:section>
-        <p14:section name="개념" id="{ac9e2334-a510-e59e-3fe5-dbffb329ffbd}">
+        <p14:section name="개념" id="{c297941f-a31b-69d5-b11b-ab690d8567a6}">
           <p14:sldIdLst/>
         </p14:section>
-        <p14:section name="연습" id="{cbabfb7e-1c31-67bb-2bd7-ff1109213f44}">
+        <p14:section name="연습" id="{fd478da5-4289-5d15-9d9e-4bfb3a3ad810}">
           <p14:sldIdLst/>
         </p14:section>
-        <p14:section name="확인" id="{d56d92cb-4500-b063-e422-a7e77c3ae5d7}">
+        <p14:section name="확인" id="{f630d77e-a345-1a52-b1e3-d5c3c39839db}">
           <p14:sldIdLst>
             <p14:sldId id="266"/>
             <p14:sldId id="267"/>
           </p14:sldIdLst>
         </p14:section>
-        <p14:section name="정리" id="{2bb36c06-9e38-2909-4570-02a936fcd70e}">
+        <p14:section name="정리" id="{e4e546b5-9fab-60c4-57ea-7763ddfd6a60}">
           <p14:sldIdLst>
             <p14:sldId id="268"/>
           </p14:sldIdLst>
         </p14:section>
-        <p14:section name="보충" id="{4715217e-0114-3e0f-9c81-c9cd87a0abe2}">
+        <p14:section name="보충" id="{c1c22f40-0127-78c2-78e7-447452bc3d1e}">
           <p14:sldIdLst>
             <p14:sldId id="269"/>
           </p14:sldIdLst>
@@ -2795,7 +2795,7 @@
               <a:buNone/>
             </a:pPr>
             <a:r>
-              <a:rPr lang="ko-KR" altLang="en-US" sz="5000" b="1" dirty="0">
+              <a:rPr lang="ko-KR" altLang="en-US" sz="4800" b="1" dirty="0">
                 <a:solidFill>
                   <a:srgbClr val="FFFFFF"/>
                 </a:solidFill>
@@ -9964,7 +9964,7 @@
           </p:nvPr>
         </p:nvGraphicFramePr>
         <p:xfrm>
-          <a:off x="6813652" y="3111500"/>
+          <a:off x="6813652" y="3152140"/>
           <a:ext cx="4826660" cy="914400"/>
         </p:xfrm>
         <a:graphic>
@@ -9976,7 +9976,7 @@
                 <a:gridCol w="1608887"/>
                 <a:gridCol w="1608887"/>
               </a:tblGrid>
-              <a:tr h="650240">
+              <a:tr h="629920">
                 <a:tc>
                   <a:txBody>
                     <a:bodyPr/>
@@ -10171,7 +10171,7 @@
                   </a:tcPr>
                 </a:tc>
               </a:tr>
-              <a:tr h="650240">
+              <a:tr h="629920">
                 <a:tc>
                   <a:txBody>
                     <a:bodyPr/>
@@ -10366,7 +10366,7 @@
                   </a:tcPr>
                 </a:tc>
               </a:tr>
-              <a:tr h="650240">
+              <a:tr h="629920">
                 <a:tc>
                   <a:txBody>
                     <a:bodyPr/>
@@ -10572,7 +10572,7 @@
                   </a:tcPr>
                 </a:tc>
               </a:tr>
-              <a:tr h="650240">
+              <a:tr h="629920">
                 <a:tc>
                   <a:txBody>
                     <a:bodyPr/>
@@ -14490,7 +14490,7 @@
           </p:nvPr>
         </p:nvGraphicFramePr>
         <p:xfrm>
-          <a:off x="6813652" y="3111500"/>
+          <a:off x="6813652" y="3152140"/>
           <a:ext cx="4826660" cy="914400"/>
         </p:xfrm>
         <a:graphic>
@@ -14502,7 +14502,7 @@
                 <a:gridCol w="1608887"/>
                 <a:gridCol w="1608887"/>
               </a:tblGrid>
-              <a:tr h="650240">
+              <a:tr h="629920">
                 <a:tc>
                   <a:txBody>
                     <a:bodyPr/>
@@ -14697,7 +14697,7 @@
                   </a:tcPr>
                 </a:tc>
               </a:tr>
-              <a:tr h="650240">
+              <a:tr h="629920">
                 <a:tc>
                   <a:txBody>
                     <a:bodyPr/>
@@ -14892,7 +14892,7 @@
                   </a:tcPr>
                 </a:tc>
               </a:tr>
-              <a:tr h="650240">
+              <a:tr h="629920">
                 <a:tc>
                   <a:txBody>
                     <a:bodyPr/>
@@ -15098,7 +15098,7 @@
                   </a:tcPr>
                 </a:tc>
               </a:tr>
-              <a:tr h="650240">
+              <a:tr h="629920">
                 <a:tc>
                   <a:txBody>
                     <a:bodyPr/>
